--- a/docs/webinar/E2E-3/E2E-3-diapositivas.pptx
+++ b/docs/webinar/E2E-3/E2E-3-diapositivas.pptx
@@ -149,12 +149,12 @@
   <p:extLst>
     <p:ext uri="{521415D9-36F7-43E2-AB2F-B90AF26B5E84}">
       <p14:sectionLst xmlns:p14="http://schemas.microsoft.com/office/powerpoint/2010/main">
-        <p14:section name="Portada" id="{a6f12db2-58fc-5f81-7f18-832aed7306e5}">
+        <p14:section name="Portada" id="{adc9ceca-2fc5-7698-852a-b401d1485b9e}">
           <p14:sldIdLst>
             <p14:sldId id="256"/>
           </p14:sldIdLst>
         </p14:section>
-        <p14:section name="Clase 1 · Del mapa de interesados al plan de compromiso" id="{6f10d4d4-ae0c-3803-e39d-c6afeb0aac0a}">
+        <p14:section name="Clase 1 · Del mapa de interesados al plan de compromiso" id="{66b8613e-f34c-78ae-a3a9-90f7a7aa7934}">
           <p14:sldIdLst>
             <p14:sldId id="257"/>
             <p14:sldId id="258"/>
@@ -177,7 +177,7 @@
             <p14:sldId id="275"/>
           </p14:sldIdLst>
         </p14:section>
-        <p14:section name="Clase 2 · Del dato al reporte y al compromiso sostenido" id="{0bee3e2f-8eac-d1fa-a3b9-84b1e1349895}">
+        <p14:section name="Clase 2 · Del dato al reporte y al compromiso sostenido" id="{5a4fa07c-c73a-1997-ce8f-cba6a9d91cb7}">
           <p14:sldIdLst>
             <p14:sldId id="276"/>
             <p14:sldId id="277"/>
@@ -202,7 +202,7 @@
             <p14:sldId id="296"/>
           </p14:sldIdLst>
         </p14:section>
-        <p14:section name="Glosario" id="{5a017f37-779d-c25d-470c-62886b408987}">
+        <p14:section name="Glosario" id="{7eb0be2f-a3dc-45af-8acb-b6c5c0ce2928}">
           <p14:sldIdLst>
             <p14:sldId id="297"/>
             <p14:sldId id="298"/>
@@ -1492,7 +1492,7 @@
           <a:p>
             <a:r>
               <a:rPr lang="en-US" dirty="0"/>
-              <a:t>Hoja en docs/webinar/E2E-3/ejercicio.md, parte A. Pedí que marquen qué frecuencias pidió la persona y cuáles supusieron ellos. La solución de referencia usa el escenario del caso.</a:t>
+              <a:t>Hoja en docs/webinar/E2E-3/ejercicio.md, parte A. Pedí que marquen qué frecuencias pidió la persona y cuáles supusieron ellos. El ejemplo resuelto, plegado al final de la hoja, usa el escenario del caso: mostralo al terminar.</a:t>
             </a:r>
             <a:endParaRPr lang="en-US" dirty="0"/>
           </a:p>

--- a/docs/webinar/E2E-3/E2E-3-diapositivas.pptx
+++ b/docs/webinar/E2E-3/E2E-3-diapositivas.pptx
@@ -151,12 +151,12 @@
   <p:extLst>
     <p:ext uri="{521415D9-36F7-43E2-AB2F-B90AF26B5E84}">
       <p14:sectionLst xmlns:p14="http://schemas.microsoft.com/office/powerpoint/2010/main">
-        <p14:section name="Portada" id="{2088bf06-a7a3-094e-f955-2c8f37a2938f}">
+        <p14:section name="Portada" id="{38fb142a-f3e4-2a71-370b-52ddf4412051}">
           <p14:sldIdLst>
             <p14:sldId id="256"/>
           </p14:sldIdLst>
         </p14:section>
-        <p14:section name="Clase 1 · Del mapa de interesados al plan de compromiso" id="{9cb42a11-c019-42b5-3318-48d861bc1983}">
+        <p14:section name="Clase 1 · Del mapa de interesados al plan de compromiso" id="{a9bd0d36-b4fa-9bf6-fc9f-69b063eb98e5}">
           <p14:sldIdLst>
             <p14:sldId id="257"/>
             <p14:sldId id="258"/>
@@ -180,7 +180,7 @@
             <p14:sldId id="276"/>
           </p14:sldIdLst>
         </p14:section>
-        <p14:section name="Clase 2 · Del dato al reporte y al compromiso sostenido" id="{9b5b5535-919a-8b7d-a5f6-a566b73c13a0}">
+        <p14:section name="Clase 2 · Del dato al reporte y al compromiso sostenido" id="{30ae0367-f793-eb8c-cd24-2440971507e1}">
           <p14:sldIdLst>
             <p14:sldId id="277"/>
             <p14:sldId id="278"/>
@@ -205,7 +205,7 @@
             <p14:sldId id="297"/>
           </p14:sldIdLst>
         </p14:section>
-        <p14:section name="Glosario" id="{0ff94fee-278c-fecc-75f1-dae4e565fcc8}">
+        <p14:section name="Glosario" id="{209089e0-d655-7c5d-74a8-062c16229ba8}">
           <p14:sldIdLst>
             <p14:sldId id="298"/>
             <p14:sldId id="299"/>
@@ -4719,7 +4719,7 @@
                   <a:srgbClr val="D6E4F0"/>
                 </a:solidFill>
               </a:rPr>
-              <a:t>pm-method 2.4.0 · Webinar E2E-3 · Clase 1</a:t>
+              <a:t>pm-method 2.5.0 · Webinar E2E-3 · Clase 1</a:t>
             </a:r>
             <a:endParaRPr lang="en-US" sz="1000" dirty="0"/>
           </a:p>
@@ -4959,7 +4959,7 @@
                   <a:srgbClr val="696969"/>
                 </a:solidFill>
               </a:rPr>
-              <a:t>pm-method 2.4.0 · Webinar E2E-3 · Clase 2</a:t>
+              <a:t>pm-method 2.5.0 · Webinar E2E-3 · Clase 2</a:t>
             </a:r>
             <a:endParaRPr lang="en-US" sz="1000" dirty="0"/>
           </a:p>
@@ -5177,7 +5177,7 @@
                   <a:srgbClr val="D6E4F0"/>
                 </a:solidFill>
               </a:rPr>
-              <a:t>pm-method 2.4.0 · Webinar E2E-3 · Clase 2</a:t>
+              <a:t>pm-method 2.5.0 · Webinar E2E-3 · Clase 2</a:t>
             </a:r>
             <a:endParaRPr lang="en-US" sz="1000" dirty="0"/>
           </a:p>
@@ -5395,7 +5395,7 @@
                   <a:srgbClr val="D6E4F0"/>
                 </a:solidFill>
               </a:rPr>
-              <a:t>pm-method 2.4.0 · Webinar E2E-3 · Clase 2</a:t>
+              <a:t>pm-method 2.5.0 · Webinar E2E-3 · Clase 2</a:t>
             </a:r>
             <a:endParaRPr lang="en-US" sz="1000" dirty="0"/>
           </a:p>
@@ -5613,7 +5613,7 @@
                   <a:srgbClr val="D6E4F0"/>
                 </a:solidFill>
               </a:rPr>
-              <a:t>pm-method 2.4.0 · Webinar E2E-3 · Clase 2</a:t>
+              <a:t>pm-method 2.5.0 · Webinar E2E-3 · Clase 2</a:t>
             </a:r>
             <a:endParaRPr lang="en-US" sz="1000" dirty="0"/>
           </a:p>
@@ -5789,7 +5789,7 @@
                   <a:srgbClr val="D6E4F0"/>
                 </a:solidFill>
               </a:rPr>
-              <a:t>pm-method 2.4.0 · Webinar E2E-3</a:t>
+              <a:t>pm-method 2.5.0 · Webinar E2E-3</a:t>
             </a:r>
             <a:endParaRPr lang="en-US" sz="1000" dirty="0"/>
           </a:p>
@@ -5984,7 +5984,7 @@
                   <a:srgbClr val="696969"/>
                 </a:solidFill>
               </a:rPr>
-              <a:t>pm-method 2.4.0 · Webinar E2E-3</a:t>
+              <a:t>pm-method 2.5.0 · Webinar E2E-3</a:t>
             </a:r>
             <a:endParaRPr lang="en-US" sz="1000" dirty="0"/>
           </a:p>
@@ -6202,7 +6202,7 @@
                   <a:srgbClr val="D6E4F0"/>
                 </a:solidFill>
               </a:rPr>
-              <a:t>pm-method 2.4.0 · Webinar E2E-3</a:t>
+              <a:t>pm-method 2.5.0 · Webinar E2E-3</a:t>
             </a:r>
             <a:endParaRPr lang="en-US" sz="1000" dirty="0"/>
           </a:p>
@@ -6420,7 +6420,7 @@
                   <a:srgbClr val="D6E4F0"/>
                 </a:solidFill>
               </a:rPr>
-              <a:t>pm-method 2.4.0 · Webinar E2E-3</a:t>
+              <a:t>pm-method 2.5.0 · Webinar E2E-3</a:t>
             </a:r>
             <a:endParaRPr lang="en-US" sz="1000" dirty="0"/>
           </a:p>
@@ -6638,7 +6638,7 @@
                   <a:srgbClr val="D6E4F0"/>
                 </a:solidFill>
               </a:rPr>
-              <a:t>pm-method 2.4.0 · Webinar E2E-3</a:t>
+              <a:t>pm-method 2.5.0 · Webinar E2E-3</a:t>
             </a:r>
             <a:endParaRPr lang="en-US" sz="1000" dirty="0"/>
           </a:p>
@@ -6878,7 +6878,7 @@
                   <a:srgbClr val="696969"/>
                 </a:solidFill>
               </a:rPr>
-              <a:t>pm-method 2.4.0 · Webinar E2E-3 · Clase 1</a:t>
+              <a:t>pm-method 2.5.0 · Webinar E2E-3 · Clase 1</a:t>
             </a:r>
             <a:endParaRPr lang="en-US" sz="1000" dirty="0"/>
           </a:p>
@@ -7096,7 +7096,7 @@
                   <a:srgbClr val="D6E4F0"/>
                 </a:solidFill>
               </a:rPr>
-              <a:t>pm-method 2.4.0 · Webinar E2E-3 · Clase 1</a:t>
+              <a:t>pm-method 2.5.0 · Webinar E2E-3 · Clase 1</a:t>
             </a:r>
             <a:endParaRPr lang="en-US" sz="1000" dirty="0"/>
           </a:p>
@@ -7314,7 +7314,7 @@
                   <a:srgbClr val="D6E4F0"/>
                 </a:solidFill>
               </a:rPr>
-              <a:t>pm-method 2.4.0 · Webinar E2E-3 · Clase 1</a:t>
+              <a:t>pm-method 2.5.0 · Webinar E2E-3 · Clase 1</a:t>
             </a:r>
             <a:endParaRPr lang="en-US" sz="1000" dirty="0"/>
           </a:p>
@@ -7758,7 +7758,7 @@
                 <a:ea typeface="Arial" pitchFamily="34" charset="-122"/>
                 <a:cs typeface="Arial" pitchFamily="34" charset="-120"/>
               </a:rPr>
-              <a:t>Webinar · pm-method 2.4.0 · E2E-3</a:t>
+              <a:t>Webinar · pm-method 2.5.0 · E2E-3</a:t>
             </a:r>
             <a:endParaRPr lang="en-US" sz="1600" dirty="0"/>
           </a:p>

--- a/docs/webinar/E2E-3/E2E-3-diapositivas.pptx
+++ b/docs/webinar/E2E-3/E2E-3-diapositivas.pptx
@@ -152,12 +152,12 @@
   <p:extLst>
     <p:ext uri="{521415D9-36F7-43E2-AB2F-B90AF26B5E84}">
       <p14:sectionLst xmlns:p14="http://schemas.microsoft.com/office/powerpoint/2010/main">
-        <p14:section name="Portada" id="{8c39f015-cbbc-db44-a95b-07b7495fc5c3}">
+        <p14:section name="Portada" id="{2e67d9b1-a5ea-f630-c0b3-a88276d1574c}">
           <p14:sldIdLst>
             <p14:sldId id="256"/>
           </p14:sldIdLst>
         </p14:section>
-        <p14:section name="Clase 1 · Del mapa de interesados al plan de compromiso" id="{b26abe37-ff07-15c0-c978-2dcd361b07fe}">
+        <p14:section name="Clase 1 · Del mapa de interesados al plan de compromiso" id="{283deee1-3c02-e404-4aa3-64ebf1d0babe}">
           <p14:sldIdLst>
             <p14:sldId id="257"/>
             <p14:sldId id="258"/>
@@ -182,7 +182,7 @@
             <p14:sldId id="277"/>
           </p14:sldIdLst>
         </p14:section>
-        <p14:section name="Clase 2 · Del dato al reporte y al compromiso sostenido" id="{ec667110-b9f1-f778-c054-1fbf2422856c}">
+        <p14:section name="Clase 2 · Del dato al reporte y al compromiso sostenido" id="{cc87e603-4261-2c75-5e81-b33289ce5a00}">
           <p14:sldIdLst>
             <p14:sldId id="278"/>
             <p14:sldId id="279"/>
@@ -207,7 +207,7 @@
             <p14:sldId id="298"/>
           </p14:sldIdLst>
         </p14:section>
-        <p14:section name="Glosario" id="{b267acda-acea-af4f-d7d0-5e1fb47d79f9}">
+        <p14:section name="Glosario" id="{2ced1d7a-2d26-ac05-a938-fb2844945f5b}">
           <p14:sldIdLst>
             <p14:sldId id="299"/>
             <p14:sldId id="300"/>
@@ -1938,7 +1938,7 @@
           <a:p>
             <a:r>
               <a:rPr lang="en-US" dirty="0"/>
-              <a:t>Clase 2 (90 minutos): Del dato al reporte y al compromiso sostenido. Objetivos: Retomar la sesión con el radar: qué decidir, escalar y desbloquear, con responsable; Armar el highlight y el tablero con un solo cálculo del período y comprobar la cadena de reporte contra el EVM guardado y hasta el correo; Explicar por qué aprobar y enviar exigen confirmación humana; Leer la salud de un KR contra su avance esperado; Vigilar la cadencia de contacto (STK-12) y reevaluar la brecha en cada período.</a:t>
+              <a:t>Clase 2 (90 minutos): Del dato al reporte y al compromiso sostenido. Objetivos: Retomar la sesión con el radar: qué decidir, escalar y desbloquear, con responsable; Armar el highlight y el tablero con un solo cálculo del período y comprobar la cadena de reporte contra el EVM guardado y hasta el correo; Explicar por qué aprobar y enviar exigen confirmación humana; Leer la salud de un KR contra su avance esperado; Vigilar la cadencia de contacto (STK-12) y reevaluar la brecha en cada período; Mostrar cómo estaba el proyecto en cada puerta y compartir el tablero de una persona con un enlace que vence.</a:t>
             </a:r>
             <a:endParaRPr lang="en-US" dirty="0"/>
           </a:p>
@@ -3434,7 +3434,7 @@
           <a:p>
             <a:r>
               <a:rPr lang="en-US" dirty="0"/>
-              <a:t>Brecha por interesado al inicio, al 5/2 y al 19/2. El sindicato y los socios cierran su brecha; TI muestra que el compromiso también retrocede, y se recupera con contacto sostenido. Paso 14.</a:t>
+              <a:t>Brecha por interesado al inicio, al 5/2 y al 19/2. El sindicato y los socios cierran su brecha; TI muestra que el compromiso también retrocede, y se recupera con contacto sostenido. Paso 14. Revisión periódica al 19/2: resumen quincenal del 5/2 (EN-012…EN-014), reuniones con TI del 12/2 y del 19/2 y A-005 cumplida, STK-12 limpio; TOL-03 recuerda que el último corte de EVM es del 8/1 y el próximo resumen vence el 26/2.</a:t>
             </a:r>
             <a:endParaRPr lang="en-US" dirty="0"/>
           </a:p>
@@ -3610,7 +3610,7 @@
           <a:p>
             <a:r>
               <a:rPr lang="en-US" dirty="0"/>
-              <a:t>TOL-03 es el mismo patrón del caso, del lado del avance: el highlight dejó de salir con un corte nuevo y el control lo recuerda en cada sesión.</a:t>
+              <a:t>Paso 15. Las instantáneas son inmutables y quedan en la bitácora: tablero.py listar y comparar las leen sin escribir nada. El tablero por actor filtra por la RACI y por lo que la persona tiene a cargo, pidió o decidió; el ciclo y las puertas son comunes. Con pm-kb, la captura muestra la instantánea de autorizar-inicio comparada con el tablero actual. El enlace compartido (pm-kb compartir crear --actor … --dias 7) se muestra una sola vez, registra sus usos y se revoca; quien lo abre ve solo ese tablero y sus fichas (g3-kb-compartido.png). Sin pm-kb, mostrar la salida de tablero.py del paso 15 en salida-g3.md.</a:t>
             </a:r>
             <a:endParaRPr lang="en-US" dirty="0"/>
           </a:p>
@@ -4809,7 +4809,7 @@
                   <a:srgbClr val="D6E4F0"/>
                 </a:solidFill>
               </a:rPr>
-              <a:t>pm-method 2.6.0 · Webinar E2E-3 · Clase 1</a:t>
+              <a:t>pm-method 2.7.0 · Webinar E2E-3 · Clase 1</a:t>
             </a:r>
             <a:endParaRPr lang="en-US" sz="1000" dirty="0"/>
           </a:p>
@@ -5049,7 +5049,7 @@
                   <a:srgbClr val="696969"/>
                 </a:solidFill>
               </a:rPr>
-              <a:t>pm-method 2.6.0 · Webinar E2E-3 · Clase 2</a:t>
+              <a:t>pm-method 2.7.0 · Webinar E2E-3 · Clase 2</a:t>
             </a:r>
             <a:endParaRPr lang="en-US" sz="1000" dirty="0"/>
           </a:p>
@@ -5267,7 +5267,7 @@
                   <a:srgbClr val="D6E4F0"/>
                 </a:solidFill>
               </a:rPr>
-              <a:t>pm-method 2.6.0 · Webinar E2E-3 · Clase 2</a:t>
+              <a:t>pm-method 2.7.0 · Webinar E2E-3 · Clase 2</a:t>
             </a:r>
             <a:endParaRPr lang="en-US" sz="1000" dirty="0"/>
           </a:p>
@@ -5485,7 +5485,7 @@
                   <a:srgbClr val="D6E4F0"/>
                 </a:solidFill>
               </a:rPr>
-              <a:t>pm-method 2.6.0 · Webinar E2E-3 · Clase 2</a:t>
+              <a:t>pm-method 2.7.0 · Webinar E2E-3 · Clase 2</a:t>
             </a:r>
             <a:endParaRPr lang="en-US" sz="1000" dirty="0"/>
           </a:p>
@@ -5703,7 +5703,7 @@
                   <a:srgbClr val="D6E4F0"/>
                 </a:solidFill>
               </a:rPr>
-              <a:t>pm-method 2.6.0 · Webinar E2E-3 · Clase 2</a:t>
+              <a:t>pm-method 2.7.0 · Webinar E2E-3 · Clase 2</a:t>
             </a:r>
             <a:endParaRPr lang="en-US" sz="1000" dirty="0"/>
           </a:p>
@@ -5879,7 +5879,7 @@
                   <a:srgbClr val="D6E4F0"/>
                 </a:solidFill>
               </a:rPr>
-              <a:t>pm-method 2.6.0 · Webinar E2E-3</a:t>
+              <a:t>pm-method 2.7.0 · Webinar E2E-3</a:t>
             </a:r>
             <a:endParaRPr lang="en-US" sz="1000" dirty="0"/>
           </a:p>
@@ -6074,7 +6074,7 @@
                   <a:srgbClr val="696969"/>
                 </a:solidFill>
               </a:rPr>
-              <a:t>pm-method 2.6.0 · Webinar E2E-3</a:t>
+              <a:t>pm-method 2.7.0 · Webinar E2E-3</a:t>
             </a:r>
             <a:endParaRPr lang="en-US" sz="1000" dirty="0"/>
           </a:p>
@@ -6292,7 +6292,7 @@
                   <a:srgbClr val="D6E4F0"/>
                 </a:solidFill>
               </a:rPr>
-              <a:t>pm-method 2.6.0 · Webinar E2E-3</a:t>
+              <a:t>pm-method 2.7.0 · Webinar E2E-3</a:t>
             </a:r>
             <a:endParaRPr lang="en-US" sz="1000" dirty="0"/>
           </a:p>
@@ -6510,7 +6510,7 @@
                   <a:srgbClr val="D6E4F0"/>
                 </a:solidFill>
               </a:rPr>
-              <a:t>pm-method 2.6.0 · Webinar E2E-3</a:t>
+              <a:t>pm-method 2.7.0 · Webinar E2E-3</a:t>
             </a:r>
             <a:endParaRPr lang="en-US" sz="1000" dirty="0"/>
           </a:p>
@@ -6728,7 +6728,7 @@
                   <a:srgbClr val="D6E4F0"/>
                 </a:solidFill>
               </a:rPr>
-              <a:t>pm-method 2.6.0 · Webinar E2E-3</a:t>
+              <a:t>pm-method 2.7.0 · Webinar E2E-3</a:t>
             </a:r>
             <a:endParaRPr lang="en-US" sz="1000" dirty="0"/>
           </a:p>
@@ -6968,7 +6968,7 @@
                   <a:srgbClr val="696969"/>
                 </a:solidFill>
               </a:rPr>
-              <a:t>pm-method 2.6.0 · Webinar E2E-3 · Clase 1</a:t>
+              <a:t>pm-method 2.7.0 · Webinar E2E-3 · Clase 1</a:t>
             </a:r>
             <a:endParaRPr lang="en-US" sz="1000" dirty="0"/>
           </a:p>
@@ -7186,7 +7186,7 @@
                   <a:srgbClr val="D6E4F0"/>
                 </a:solidFill>
               </a:rPr>
-              <a:t>pm-method 2.6.0 · Webinar E2E-3 · Clase 1</a:t>
+              <a:t>pm-method 2.7.0 · Webinar E2E-3 · Clase 1</a:t>
             </a:r>
             <a:endParaRPr lang="en-US" sz="1000" dirty="0"/>
           </a:p>
@@ -7404,7 +7404,7 @@
                   <a:srgbClr val="D6E4F0"/>
                 </a:solidFill>
               </a:rPr>
-              <a:t>pm-method 2.6.0 · Webinar E2E-3 · Clase 1</a:t>
+              <a:t>pm-method 2.7.0 · Webinar E2E-3 · Clase 1</a:t>
             </a:r>
             <a:endParaRPr lang="en-US" sz="1000" dirty="0"/>
           </a:p>
@@ -7848,7 +7848,7 @@
                 <a:ea typeface="Arial" pitchFamily="34" charset="-122"/>
                 <a:cs typeface="Arial" pitchFamily="34" charset="-120"/>
               </a:rPr>
-              <a:t>Webinar · pm-method 2.6.0 · E2E-3</a:t>
+              <a:t>Webinar · pm-method 2.7.0 · E2E-3</a:t>
             </a:r>
             <a:endParaRPr lang="en-US" sz="1600" dirty="0"/>
           </a:p>
@@ -18002,11 +18002,11 @@
         <p:spPr>
           <a:xfrm>
             <a:off x="548640" y="2743200"/>
-            <a:ext cx="11091672" cy="592531"/>
+            <a:ext cx="11091672" cy="472440"/>
           </a:xfrm>
           <a:prstGeom prst="roundRect">
             <a:avLst>
-              <a:gd name="adj" fmla="val 15432"/>
+              <a:gd name="adj" fmla="val 19355"/>
             </a:avLst>
           </a:prstGeom>
           <a:solidFill>
@@ -18029,7 +18029,7 @@
         <p:spPr>
           <a:xfrm>
             <a:off x="685800" y="2743200"/>
-            <a:ext cx="411480" cy="592531"/>
+            <a:ext cx="411480" cy="472440"/>
           </a:xfrm>
           <a:prstGeom prst="rect">
             <a:avLst/>
@@ -18068,7 +18068,7 @@
         <p:spPr>
           <a:xfrm>
             <a:off x="1234440" y="2779776"/>
-            <a:ext cx="10268712" cy="519379"/>
+            <a:ext cx="10268712" cy="399288"/>
           </a:xfrm>
           <a:prstGeom prst="rect">
             <a:avLst/>
@@ -18084,7 +18084,7 @@
               <a:buNone/>
             </a:pPr>
             <a:r>
-              <a:rPr lang="en-US" sz="1600" dirty="0">
+              <a:rPr lang="en-US" sz="1400" dirty="0">
                 <a:solidFill>
                   <a:srgbClr val="FFFFFF"/>
                 </a:solidFill>
@@ -18106,12 +18106,12 @@
         </p:nvSpPr>
         <p:spPr>
           <a:xfrm>
-            <a:off x="548640" y="3463747"/>
-            <a:ext cx="11091672" cy="592531"/>
+            <a:off x="548640" y="3343656"/>
+            <a:ext cx="11091672" cy="472440"/>
           </a:xfrm>
           <a:prstGeom prst="roundRect">
             <a:avLst>
-              <a:gd name="adj" fmla="val 15432"/>
+              <a:gd name="adj" fmla="val 19355"/>
             </a:avLst>
           </a:prstGeom>
           <a:solidFill>
@@ -18133,8 +18133,8 @@
         </p:nvSpPr>
         <p:spPr>
           <a:xfrm>
-            <a:off x="685800" y="3463747"/>
-            <a:ext cx="411480" cy="592531"/>
+            <a:off x="685800" y="3343656"/>
+            <a:ext cx="411480" cy="472440"/>
           </a:xfrm>
           <a:prstGeom prst="rect">
             <a:avLst/>
@@ -18172,8 +18172,8 @@
         </p:nvSpPr>
         <p:spPr>
           <a:xfrm>
-            <a:off x="1234440" y="3500323"/>
-            <a:ext cx="10268712" cy="519379"/>
+            <a:off x="1234440" y="3380232"/>
+            <a:ext cx="10268712" cy="399288"/>
           </a:xfrm>
           <a:prstGeom prst="rect">
             <a:avLst/>
@@ -18189,7 +18189,7 @@
               <a:buNone/>
             </a:pPr>
             <a:r>
-              <a:rPr lang="en-US" sz="1600" dirty="0">
+              <a:rPr lang="en-US" sz="1400" dirty="0">
                 <a:solidFill>
                   <a:srgbClr val="FFFFFF"/>
                 </a:solidFill>
@@ -18211,12 +18211,12 @@
         </p:nvSpPr>
         <p:spPr>
           <a:xfrm>
-            <a:off x="548640" y="4184294"/>
-            <a:ext cx="11091672" cy="592531"/>
+            <a:off x="548640" y="3944112"/>
+            <a:ext cx="11091672" cy="472440"/>
           </a:xfrm>
           <a:prstGeom prst="roundRect">
             <a:avLst>
-              <a:gd name="adj" fmla="val 15432"/>
+              <a:gd name="adj" fmla="val 19355"/>
             </a:avLst>
           </a:prstGeom>
           <a:solidFill>
@@ -18238,8 +18238,8 @@
         </p:nvSpPr>
         <p:spPr>
           <a:xfrm>
-            <a:off x="685800" y="4184294"/>
-            <a:ext cx="411480" cy="592531"/>
+            <a:off x="685800" y="3944112"/>
+            <a:ext cx="411480" cy="472440"/>
           </a:xfrm>
           <a:prstGeom prst="rect">
             <a:avLst/>
@@ -18277,8 +18277,8 @@
         </p:nvSpPr>
         <p:spPr>
           <a:xfrm>
-            <a:off x="1234440" y="4220870"/>
-            <a:ext cx="10268712" cy="519379"/>
+            <a:off x="1234440" y="3980688"/>
+            <a:ext cx="10268712" cy="399288"/>
           </a:xfrm>
           <a:prstGeom prst="rect">
             <a:avLst/>
@@ -18294,7 +18294,7 @@
               <a:buNone/>
             </a:pPr>
             <a:r>
-              <a:rPr lang="en-US" sz="1600" dirty="0">
+              <a:rPr lang="en-US" sz="1400" dirty="0">
                 <a:solidFill>
                   <a:srgbClr val="FFFFFF"/>
                 </a:solidFill>
@@ -18316,12 +18316,12 @@
         </p:nvSpPr>
         <p:spPr>
           <a:xfrm>
-            <a:off x="548640" y="4904842"/>
-            <a:ext cx="11091672" cy="592531"/>
+            <a:off x="548640" y="4544568"/>
+            <a:ext cx="11091672" cy="472440"/>
           </a:xfrm>
           <a:prstGeom prst="roundRect">
             <a:avLst>
-              <a:gd name="adj" fmla="val 15432"/>
+              <a:gd name="adj" fmla="val 19355"/>
             </a:avLst>
           </a:prstGeom>
           <a:solidFill>
@@ -18343,8 +18343,8 @@
         </p:nvSpPr>
         <p:spPr>
           <a:xfrm>
-            <a:off x="685800" y="4904842"/>
-            <a:ext cx="411480" cy="592531"/>
+            <a:off x="685800" y="4544568"/>
+            <a:ext cx="411480" cy="472440"/>
           </a:xfrm>
           <a:prstGeom prst="rect">
             <a:avLst/>
@@ -18382,8 +18382,8 @@
         </p:nvSpPr>
         <p:spPr>
           <a:xfrm>
-            <a:off x="1234440" y="4941418"/>
-            <a:ext cx="10268712" cy="519379"/>
+            <a:off x="1234440" y="4581144"/>
+            <a:ext cx="10268712" cy="399288"/>
           </a:xfrm>
           <a:prstGeom prst="rect">
             <a:avLst/>
@@ -18399,7 +18399,7 @@
               <a:buNone/>
             </a:pPr>
             <a:r>
-              <a:rPr lang="en-US" sz="1600" dirty="0">
+              <a:rPr lang="en-US" sz="1400" dirty="0">
                 <a:solidFill>
                   <a:srgbClr val="FFFFFF"/>
                 </a:solidFill>
@@ -18421,12 +18421,12 @@
         </p:nvSpPr>
         <p:spPr>
           <a:xfrm>
-            <a:off x="548640" y="5625389"/>
-            <a:ext cx="11091672" cy="592531"/>
+            <a:off x="548640" y="5145024"/>
+            <a:ext cx="11091672" cy="472440"/>
           </a:xfrm>
           <a:prstGeom prst="roundRect">
             <a:avLst>
-              <a:gd name="adj" fmla="val 15432"/>
+              <a:gd name="adj" fmla="val 19355"/>
             </a:avLst>
           </a:prstGeom>
           <a:solidFill>
@@ -18448,8 +18448,8 @@
         </p:nvSpPr>
         <p:spPr>
           <a:xfrm>
-            <a:off x="685800" y="5625389"/>
-            <a:ext cx="411480" cy="592531"/>
+            <a:off x="685800" y="5145024"/>
+            <a:ext cx="411480" cy="472440"/>
           </a:xfrm>
           <a:prstGeom prst="rect">
             <a:avLst/>
@@ -18487,8 +18487,8 @@
         </p:nvSpPr>
         <p:spPr>
           <a:xfrm>
-            <a:off x="1234440" y="5661965"/>
-            <a:ext cx="10268712" cy="519379"/>
+            <a:off x="1234440" y="5181600"/>
+            <a:ext cx="10268712" cy="399288"/>
           </a:xfrm>
           <a:prstGeom prst="rect">
             <a:avLst/>
@@ -18504,7 +18504,7 @@
               <a:buNone/>
             </a:pPr>
             <a:r>
-              <a:rPr lang="en-US" sz="1600" dirty="0">
+              <a:rPr lang="en-US" sz="1400" dirty="0">
                 <a:solidFill>
                   <a:srgbClr val="FFFFFF"/>
                 </a:solidFill>
@@ -18513,6 +18513,111 @@
                 <a:cs typeface="Arial" pitchFamily="34" charset="-120"/>
               </a:rPr>
               <a:t>Vigilar la cadencia de contacto (STK-12) y reevaluar la brecha en cada período</a:t>
+            </a:r>
+            <a:endParaRPr lang="en-US" sz="1600" dirty="0"/>
+          </a:p>
+        </p:txBody>
+      </p:sp>
+      <p:sp>
+        <p:nvSpPr>
+          <p:cNvPr id="20" name="Shape 18"/>
+          <p:cNvSpPr/>
+          <p:nvPr/>
+        </p:nvSpPr>
+        <p:spPr>
+          <a:xfrm>
+            <a:off x="548640" y="5745480"/>
+            <a:ext cx="11091672" cy="472440"/>
+          </a:xfrm>
+          <a:prstGeom prst="roundRect">
+            <a:avLst>
+              <a:gd name="adj" fmla="val 19355"/>
+            </a:avLst>
+          </a:prstGeom>
+          <a:solidFill>
+            <a:srgbClr val="173D66"/>
+          </a:solidFill>
+          <a:ln w="12700">
+            <a:solidFill>
+              <a:srgbClr val="173D66"/>
+            </a:solidFill>
+            <a:prstDash val="solid"/>
+          </a:ln>
+        </p:spPr>
+      </p:sp>
+      <p:sp>
+        <p:nvSpPr>
+          <p:cNvPr id="21" name="Text 19"/>
+          <p:cNvSpPr txBox="1"/>
+          <p:nvPr/>
+        </p:nvSpPr>
+        <p:spPr>
+          <a:xfrm>
+            <a:off x="685800" y="5745480"/>
+            <a:ext cx="411480" cy="472440"/>
+          </a:xfrm>
+          <a:prstGeom prst="rect">
+            <a:avLst/>
+          </a:prstGeom>
+          <a:noFill/>
+          <a:ln/>
+        </p:spPr>
+        <p:txBody>
+          <a:bodyPr wrap="square" lIns="0" tIns="0" rIns="0" bIns="0" rtlCol="0" anchor="ctr"/>
+          <a:lstStyle/>
+          <a:p>
+            <a:pPr indent="0" marL="0">
+              <a:buNone/>
+            </a:pPr>
+            <a:r>
+              <a:rPr lang="en-US" sz="2000" b="1" dirty="0">
+                <a:solidFill>
+                  <a:srgbClr val="9FD0F0"/>
+                </a:solidFill>
+                <a:latin typeface="Arial" pitchFamily="34" charset="0"/>
+                <a:ea typeface="Arial" pitchFamily="34" charset="-122"/>
+                <a:cs typeface="Arial" pitchFamily="34" charset="-120"/>
+              </a:rPr>
+              <a:t>6</a:t>
+            </a:r>
+            <a:endParaRPr lang="en-US" sz="2000" dirty="0"/>
+          </a:p>
+        </p:txBody>
+      </p:sp>
+      <p:sp>
+        <p:nvSpPr>
+          <p:cNvPr id="22" name="Text 20"/>
+          <p:cNvSpPr txBox="1"/>
+          <p:nvPr/>
+        </p:nvSpPr>
+        <p:spPr>
+          <a:xfrm>
+            <a:off x="1234440" y="5782056"/>
+            <a:ext cx="10268712" cy="399288"/>
+          </a:xfrm>
+          <a:prstGeom prst="rect">
+            <a:avLst/>
+          </a:prstGeom>
+          <a:noFill/>
+          <a:ln/>
+        </p:spPr>
+        <p:txBody>
+          <a:bodyPr wrap="square" lIns="0" tIns="0" rIns="0" bIns="0" rtlCol="0" anchor="ctr"/>
+          <a:lstStyle/>
+          <a:p>
+            <a:pPr indent="0" marL="0">
+              <a:buNone/>
+            </a:pPr>
+            <a:r>
+              <a:rPr lang="en-US" sz="1400" dirty="0">
+                <a:solidFill>
+                  <a:srgbClr val="FFFFFF"/>
+                </a:solidFill>
+                <a:latin typeface="Arial" pitchFamily="34" charset="0"/>
+                <a:ea typeface="Arial" pitchFamily="34" charset="-122"/>
+                <a:cs typeface="Arial" pitchFamily="34" charset="-120"/>
+              </a:rPr>
+              <a:t>Mostrar cómo estaba el proyecto en cada puerta y compartir el tablero de una persona con un enlace que vence</a:t>
             </a:r>
             <a:endParaRPr lang="en-US" sz="1600" dirty="0"/>
           </a:p>
@@ -27326,34 +27431,58 @@
                 <a:ea typeface="Arial" pitchFamily="34" charset="-122"/>
                 <a:cs typeface="Arial" pitchFamily="34" charset="-120"/>
               </a:rPr>
-              <a:t>Revisión periódica al 19/2</a:t>
+              <a:t>Cada puerta deja su tablero; cada persona ve lo suyo</a:t>
             </a:r>
             <a:endParaRPr lang="en-US" sz="2400" dirty="0"/>
           </a:p>
         </p:txBody>
       </p:sp>
-      <p:sp>
-        <p:nvSpPr>
-          <p:cNvPr id="3" name="Shape 1"/>
+      <p:pic>
+        <p:nvPicPr>
+          <p:cNvPr id="3" name="Image 0" descr="Cada puerta deja su tablero; cada persona ve lo suyo">    </p:cNvPr>
+          <p:cNvPicPr>
+            <a:picLocks noChangeAspect="1"/>
+          </p:cNvPicPr>
+          <p:nvPr/>
+        </p:nvPicPr>
+        <p:blipFill>
+          <a:blip r:embed="rId1"/>
+          <a:stretch>
+            <a:fillRect/>
+          </a:stretch>
+        </p:blipFill>
+        <p:spPr>
+          <a:xfrm>
+            <a:off x="457200" y="1671066"/>
+            <a:ext cx="7388352" cy="4155948"/>
+          </a:xfrm>
+          <a:prstGeom prst="rect">
+            <a:avLst/>
+          </a:prstGeom>
+        </p:spPr>
+      </p:pic>
+      <p:sp>
+        <p:nvSpPr>
+          <p:cNvPr id="4" name="Shape 1"/>
           <p:cNvSpPr/>
           <p:nvPr/>
         </p:nvSpPr>
         <p:spPr>
           <a:xfrm>
-            <a:off x="457200" y="1280160"/>
-            <a:ext cx="11274552" cy="870509"/>
-          </a:xfrm>
-          <a:prstGeom prst="roundRect">
-            <a:avLst>
-              <a:gd name="adj" fmla="val 10504"/>
-            </a:avLst>
+            <a:off x="457200" y="1671066"/>
+            <a:ext cx="7388352" cy="4155948"/>
+          </a:xfrm>
+          <a:prstGeom prst="rect">
+            <a:avLst/>
           </a:prstGeom>
           <a:solidFill>
-            <a:srgbClr val="E9F1F8"/>
+            <a:srgbClr val="FFFFFF">
+              <a:alpha val="0"/>
+            </a:srgbClr>
           </a:solidFill>
-          <a:ln w="12700">
+          <a:ln w="9525">
             <a:solidFill>
-              <a:srgbClr val="E9F1F8"/>
+              <a:srgbClr val="E2E2E6"/>
             </a:solidFill>
             <a:prstDash val="solid"/>
           </a:ln>
@@ -27361,123 +27490,18 @@
       </p:sp>
       <p:sp>
         <p:nvSpPr>
-          <p:cNvPr id="4" name="Shape 2"/>
+          <p:cNvPr id="5" name="Shape 2"/>
           <p:cNvSpPr/>
           <p:nvPr/>
         </p:nvSpPr>
         <p:spPr>
           <a:xfrm>
-            <a:off x="621792" y="1486814"/>
-            <a:ext cx="457200" cy="457200"/>
+            <a:off x="8119872" y="1280160"/>
+            <a:ext cx="3611880" cy="4937760"/>
           </a:xfrm>
           <a:prstGeom prst="roundRect">
             <a:avLst>
-              <a:gd name="adj" fmla="val 16000"/>
-            </a:avLst>
-          </a:prstGeom>
-          <a:solidFill>
-            <a:srgbClr val="00629B"/>
-          </a:solidFill>
-          <a:ln w="12700">
-            <a:solidFill>
-              <a:srgbClr val="00629B"/>
-            </a:solidFill>
-            <a:prstDash val="solid"/>
-          </a:ln>
-        </p:spPr>
-      </p:sp>
-      <p:sp>
-        <p:nvSpPr>
-          <p:cNvPr id="5" name="Text 3"/>
-          <p:cNvSpPr txBox="1"/>
-          <p:nvPr/>
-        </p:nvSpPr>
-        <p:spPr>
-          <a:xfrm>
-            <a:off x="621792" y="1486814"/>
-            <a:ext cx="457200" cy="457200"/>
-          </a:xfrm>
-          <a:prstGeom prst="rect">
-            <a:avLst/>
-          </a:prstGeom>
-          <a:noFill/>
-          <a:ln/>
-        </p:spPr>
-        <p:txBody>
-          <a:bodyPr wrap="square" lIns="0" tIns="0" rIns="0" bIns="0" rtlCol="0" anchor="ctr"/>
-          <a:lstStyle/>
-          <a:p>
-            <a:pPr algn="ctr" indent="0" marL="0">
-              <a:buNone/>
-            </a:pPr>
-            <a:r>
-              <a:rPr lang="en-US" sz="1600" b="1" dirty="0">
-                <a:solidFill>
-                  <a:srgbClr val="FFFFFF"/>
-                </a:solidFill>
-                <a:latin typeface="Arial" pitchFamily="34" charset="0"/>
-                <a:ea typeface="Arial" pitchFamily="34" charset="-122"/>
-                <a:cs typeface="Arial" pitchFamily="34" charset="-120"/>
-              </a:rPr>
-              <a:t>1</a:t>
-            </a:r>
-            <a:endParaRPr lang="en-US" sz="1600" dirty="0"/>
-          </a:p>
-        </p:txBody>
-      </p:sp>
-      <p:sp>
-        <p:nvSpPr>
-          <p:cNvPr id="6" name="Text 4"/>
-          <p:cNvSpPr txBox="1"/>
-          <p:nvPr/>
-        </p:nvSpPr>
-        <p:spPr>
-          <a:xfrm>
-            <a:off x="1280160" y="1335024"/>
-            <a:ext cx="10222992" cy="760781"/>
-          </a:xfrm>
-          <a:prstGeom prst="rect">
-            <a:avLst/>
-          </a:prstGeom>
-          <a:noFill/>
-          <a:ln/>
-        </p:spPr>
-        <p:txBody>
-          <a:bodyPr wrap="square" lIns="0" tIns="0" rIns="0" bIns="0" rtlCol="0" anchor="ctr"/>
-          <a:lstStyle/>
-          <a:p>
-            <a:pPr indent="0" marL="0">
-              <a:buNone/>
-            </a:pPr>
-            <a:r>
-              <a:rPr lang="en-US" sz="2000" dirty="0">
-                <a:solidFill>
-                  <a:srgbClr val="272425"/>
-                </a:solidFill>
-                <a:latin typeface="Arial" pitchFamily="34" charset="0"/>
-                <a:ea typeface="Arial" pitchFamily="34" charset="-122"/>
-                <a:cs typeface="Arial" pitchFamily="34" charset="-120"/>
-              </a:rPr>
-              <a:t>Resumen quincenal del 5/2: EN-012…EN-014</a:t>
-            </a:r>
-            <a:endParaRPr lang="en-US" sz="1600" dirty="0"/>
-          </a:p>
-        </p:txBody>
-      </p:sp>
-      <p:sp>
-        <p:nvSpPr>
-          <p:cNvPr id="7" name="Shape 5"/>
-          <p:cNvSpPr/>
-          <p:nvPr/>
-        </p:nvSpPr>
-        <p:spPr>
-          <a:xfrm>
-            <a:off x="457200" y="2296973"/>
-            <a:ext cx="11274552" cy="870509"/>
-          </a:xfrm>
-          <a:prstGeom prst="roundRect">
-            <a:avLst>
-              <a:gd name="adj" fmla="val 10504"/>
+              <a:gd name="adj" fmla="val 2532"/>
             </a:avLst>
           </a:prstGeom>
           <a:solidFill>
@@ -27493,41 +27517,14 @@
       </p:sp>
       <p:sp>
         <p:nvSpPr>
-          <p:cNvPr id="8" name="Shape 6"/>
-          <p:cNvSpPr/>
-          <p:nvPr/>
-        </p:nvSpPr>
-        <p:spPr>
-          <a:xfrm>
-            <a:off x="621792" y="2503627"/>
-            <a:ext cx="457200" cy="457200"/>
-          </a:xfrm>
-          <a:prstGeom prst="roundRect">
-            <a:avLst>
-              <a:gd name="adj" fmla="val 16000"/>
-            </a:avLst>
-          </a:prstGeom>
-          <a:solidFill>
-            <a:srgbClr val="00629B"/>
-          </a:solidFill>
-          <a:ln w="12700">
-            <a:solidFill>
-              <a:srgbClr val="00629B"/>
-            </a:solidFill>
-            <a:prstDash val="solid"/>
-          </a:ln>
-        </p:spPr>
-      </p:sp>
-      <p:sp>
-        <p:nvSpPr>
-          <p:cNvPr id="9" name="Text 7"/>
+          <p:cNvPr id="6" name="Text 3"/>
           <p:cNvSpPr txBox="1"/>
           <p:nvPr/>
         </p:nvSpPr>
         <p:spPr>
           <a:xfrm>
-            <a:off x="621792" y="2503627"/>
-            <a:ext cx="457200" cy="457200"/>
+            <a:off x="8321040" y="1426464"/>
+            <a:ext cx="3209544" cy="347472"/>
           </a:xfrm>
           <a:prstGeom prst="rect">
             <a:avLst/>
@@ -27536,22 +27533,22 @@
           <a:ln/>
         </p:spPr>
         <p:txBody>
-          <a:bodyPr wrap="square" lIns="0" tIns="0" rIns="0" bIns="0" rtlCol="0" anchor="ctr"/>
+          <a:bodyPr wrap="square" lIns="0" tIns="0" rIns="0" bIns="0" rtlCol="0" anchor="t"/>
           <a:lstStyle/>
           <a:p>
-            <a:pPr algn="ctr" indent="0" marL="0">
+            <a:pPr indent="0" marL="0">
               <a:buNone/>
             </a:pPr>
             <a:r>
               <a:rPr lang="en-US" sz="1600" b="1" dirty="0">
                 <a:solidFill>
-                  <a:srgbClr val="FFFFFF"/>
+                  <a:srgbClr val="B5651D"/>
                 </a:solidFill>
                 <a:latin typeface="Arial" pitchFamily="34" charset="0"/>
                 <a:ea typeface="Arial" pitchFamily="34" charset="-122"/>
                 <a:cs typeface="Arial" pitchFamily="34" charset="-120"/>
               </a:rPr>
-              <a:t>2</a:t>
+              <a:t>Para mirar</a:t>
             </a:r>
             <a:endParaRPr lang="en-US" sz="1600" dirty="0"/>
           </a:p>
@@ -27559,14 +27556,14 @@
       </p:sp>
       <p:sp>
         <p:nvSpPr>
-          <p:cNvPr id="10" name="Text 8"/>
+          <p:cNvPr id="7" name="Text 4"/>
           <p:cNvSpPr txBox="1"/>
           <p:nvPr/>
         </p:nvSpPr>
         <p:spPr>
           <a:xfrm>
-            <a:off x="1280160" y="2351837"/>
-            <a:ext cx="10222992" cy="760781"/>
+            <a:off x="8321040" y="1847088"/>
+            <a:ext cx="3209544" cy="4206240"/>
           </a:xfrm>
           <a:prstGeom prst="rect">
             <a:avLst/>
@@ -27575,14 +27572,34 @@
           <a:ln/>
         </p:spPr>
         <p:txBody>
-          <a:bodyPr wrap="square" lIns="0" tIns="0" rIns="0" bIns="0" rtlCol="0" anchor="ctr"/>
+          <a:bodyPr wrap="square" lIns="0" tIns="0" rIns="0" bIns="0" rtlCol="0" anchor="t"/>
           <a:lstStyle/>
           <a:p>
             <a:pPr indent="0" marL="0">
+              <a:spcAft>
+                <a:spcPts val="800"/>
+              </a:spcAft>
               <a:buNone/>
             </a:pPr>
             <a:r>
-              <a:rPr lang="en-US" sz="2000" dirty="0">
+              <a:rPr lang="en-US" sz="1700" b="1" dirty="0">
+                <a:solidFill>
+                  <a:srgbClr val="00629B"/>
+                </a:solidFill>
+                <a:latin typeface="Arial" pitchFamily="34" charset="0"/>
+                <a:ea typeface="Arial" pitchFamily="34" charset="-122"/>
+                <a:cs typeface="Arial" pitchFamily="34" charset="-120"/>
+              </a:rPr>
+              <a:t>▪  </a:t>
+            </a:r>
+            <a:pPr indent="0" marL="0">
+              <a:spcAft>
+                <a:spcPts val="800"/>
+              </a:spcAft>
+              <a:buNone/>
+            </a:pPr>
+            <a:r>
+              <a:rPr lang="en-US" sz="1700" dirty="0">
                 <a:solidFill>
                   <a:srgbClr val="272425"/>
                 </a:solidFill>
@@ -27590,131 +27607,36 @@
                 <a:ea typeface="Arial" pitchFamily="34" charset="-122"/>
                 <a:cs typeface="Arial" pitchFamily="34" charset="-120"/>
               </a:rPr>
-              <a:t>Reuniones con TI del 12/2 y del 19/2; A-005 cumplida</a:t>
+              <a:t>estado.py puerta congela el tablero antes de decidir</a:t>
             </a:r>
             <a:endParaRPr lang="en-US" sz="1600" dirty="0"/>
           </a:p>
-        </p:txBody>
-      </p:sp>
-      <p:sp>
-        <p:nvSpPr>
-          <p:cNvPr id="11" name="Shape 9"/>
-          <p:cNvSpPr/>
-          <p:nvPr/>
-        </p:nvSpPr>
-        <p:spPr>
-          <a:xfrm>
-            <a:off x="457200" y="3313786"/>
-            <a:ext cx="11274552" cy="870509"/>
-          </a:xfrm>
-          <a:prstGeom prst="roundRect">
-            <a:avLst>
-              <a:gd name="adj" fmla="val 10504"/>
-            </a:avLst>
-          </a:prstGeom>
-          <a:solidFill>
-            <a:srgbClr val="E9F1F8"/>
-          </a:solidFill>
-          <a:ln w="12700">
-            <a:solidFill>
-              <a:srgbClr val="E9F1F8"/>
-            </a:solidFill>
-            <a:prstDash val="solid"/>
-          </a:ln>
-        </p:spPr>
-      </p:sp>
-      <p:sp>
-        <p:nvSpPr>
-          <p:cNvPr id="12" name="Shape 10"/>
-          <p:cNvSpPr/>
-          <p:nvPr/>
-        </p:nvSpPr>
-        <p:spPr>
-          <a:xfrm>
-            <a:off x="621792" y="3520440"/>
-            <a:ext cx="457200" cy="457200"/>
-          </a:xfrm>
-          <a:prstGeom prst="roundRect">
-            <a:avLst>
-              <a:gd name="adj" fmla="val 16000"/>
-            </a:avLst>
-          </a:prstGeom>
-          <a:solidFill>
-            <a:srgbClr val="00629B"/>
-          </a:solidFill>
-          <a:ln w="12700">
-            <a:solidFill>
-              <a:srgbClr val="00629B"/>
-            </a:solidFill>
-            <a:prstDash val="solid"/>
-          </a:ln>
-        </p:spPr>
-      </p:sp>
-      <p:sp>
-        <p:nvSpPr>
-          <p:cNvPr id="13" name="Text 11"/>
-          <p:cNvSpPr txBox="1"/>
-          <p:nvPr/>
-        </p:nvSpPr>
-        <p:spPr>
-          <a:xfrm>
-            <a:off x="621792" y="3520440"/>
-            <a:ext cx="457200" cy="457200"/>
-          </a:xfrm>
-          <a:prstGeom prst="rect">
-            <a:avLst/>
-          </a:prstGeom>
-          <a:noFill/>
-          <a:ln/>
-        </p:spPr>
-        <p:txBody>
-          <a:bodyPr wrap="square" lIns="0" tIns="0" rIns="0" bIns="0" rtlCol="0" anchor="ctr"/>
-          <a:lstStyle/>
-          <a:p>
-            <a:pPr algn="ctr" indent="0" marL="0">
+          <a:p>
+            <a:pPr indent="0" marL="0">
+              <a:spcAft>
+                <a:spcPts val="800"/>
+              </a:spcAft>
               <a:buNone/>
             </a:pPr>
             <a:r>
-              <a:rPr lang="en-US" sz="1600" b="1" dirty="0">
+              <a:rPr lang="en-US" sz="1700" b="1" dirty="0">
                 <a:solidFill>
-                  <a:srgbClr val="FFFFFF"/>
+                  <a:srgbClr val="00629B"/>
                 </a:solidFill>
                 <a:latin typeface="Arial" pitchFamily="34" charset="0"/>
                 <a:ea typeface="Arial" pitchFamily="34" charset="-122"/>
                 <a:cs typeface="Arial" pitchFamily="34" charset="-120"/>
               </a:rPr>
-              <a:t>3</a:t>
+              <a:t>▪  </a:t>
             </a:r>
-            <a:endParaRPr lang="en-US" sz="1600" dirty="0"/>
-          </a:p>
-        </p:txBody>
-      </p:sp>
-      <p:sp>
-        <p:nvSpPr>
-          <p:cNvPr id="14" name="Text 12"/>
-          <p:cNvSpPr txBox="1"/>
-          <p:nvPr/>
-        </p:nvSpPr>
-        <p:spPr>
-          <a:xfrm>
-            <a:off x="1280160" y="3368650"/>
-            <a:ext cx="10222992" cy="760781"/>
-          </a:xfrm>
-          <a:prstGeom prst="rect">
-            <a:avLst/>
-          </a:prstGeom>
-          <a:noFill/>
-          <a:ln/>
-        </p:spPr>
-        <p:txBody>
-          <a:bodyPr wrap="square" lIns="0" tIns="0" rIns="0" bIns="0" rtlCol="0" anchor="ctr"/>
-          <a:lstStyle/>
-          <a:p>
             <a:pPr indent="0" marL="0">
+              <a:spcAft>
+                <a:spcPts val="800"/>
+              </a:spcAft>
               <a:buNone/>
             </a:pPr>
             <a:r>
-              <a:rPr lang="en-US" sz="2000" dirty="0">
+              <a:rPr lang="en-US" sz="1700" dirty="0">
                 <a:solidFill>
                   <a:srgbClr val="272425"/>
                 </a:solidFill>
@@ -27722,131 +27644,36 @@
                 <a:ea typeface="Arial" pitchFamily="34" charset="-122"/>
                 <a:cs typeface="Arial" pitchFamily="34" charset="-120"/>
               </a:rPr>
-              <a:t>STK-12 limpio; brecha total en 3 niveles</a:t>
+              <a:t>3 instantáneas: inicio, proyecto y etapa 2</a:t>
             </a:r>
             <a:endParaRPr lang="en-US" sz="1600" dirty="0"/>
           </a:p>
-        </p:txBody>
-      </p:sp>
-      <p:sp>
-        <p:nvSpPr>
-          <p:cNvPr id="15" name="Shape 13"/>
-          <p:cNvSpPr/>
-          <p:nvPr/>
-        </p:nvSpPr>
-        <p:spPr>
-          <a:xfrm>
-            <a:off x="457200" y="4330598"/>
-            <a:ext cx="11274552" cy="870509"/>
-          </a:xfrm>
-          <a:prstGeom prst="roundRect">
-            <a:avLst>
-              <a:gd name="adj" fmla="val 10504"/>
-            </a:avLst>
-          </a:prstGeom>
-          <a:solidFill>
-            <a:srgbClr val="F4F6F8"/>
-          </a:solidFill>
-          <a:ln w="12700">
-            <a:solidFill>
-              <a:srgbClr val="F4F6F8"/>
-            </a:solidFill>
-            <a:prstDash val="solid"/>
-          </a:ln>
-        </p:spPr>
-      </p:sp>
-      <p:sp>
-        <p:nvSpPr>
-          <p:cNvPr id="16" name="Shape 14"/>
-          <p:cNvSpPr/>
-          <p:nvPr/>
-        </p:nvSpPr>
-        <p:spPr>
-          <a:xfrm>
-            <a:off x="621792" y="4537253"/>
-            <a:ext cx="457200" cy="457200"/>
-          </a:xfrm>
-          <a:prstGeom prst="roundRect">
-            <a:avLst>
-              <a:gd name="adj" fmla="val 16000"/>
-            </a:avLst>
-          </a:prstGeom>
-          <a:solidFill>
-            <a:srgbClr val="00629B"/>
-          </a:solidFill>
-          <a:ln w="12700">
-            <a:solidFill>
-              <a:srgbClr val="00629B"/>
-            </a:solidFill>
-            <a:prstDash val="solid"/>
-          </a:ln>
-        </p:spPr>
-      </p:sp>
-      <p:sp>
-        <p:nvSpPr>
-          <p:cNvPr id="17" name="Text 15"/>
-          <p:cNvSpPr txBox="1"/>
-          <p:nvPr/>
-        </p:nvSpPr>
-        <p:spPr>
-          <a:xfrm>
-            <a:off x="621792" y="4537253"/>
-            <a:ext cx="457200" cy="457200"/>
-          </a:xfrm>
-          <a:prstGeom prst="rect">
-            <a:avLst/>
-          </a:prstGeom>
-          <a:noFill/>
-          <a:ln/>
-        </p:spPr>
-        <p:txBody>
-          <a:bodyPr wrap="square" lIns="0" tIns="0" rIns="0" bIns="0" rtlCol="0" anchor="ctr"/>
-          <a:lstStyle/>
-          <a:p>
-            <a:pPr algn="ctr" indent="0" marL="0">
+          <a:p>
+            <a:pPr indent="0" marL="0">
+              <a:spcAft>
+                <a:spcPts val="800"/>
+              </a:spcAft>
               <a:buNone/>
             </a:pPr>
             <a:r>
-              <a:rPr lang="en-US" sz="1600" b="1" dirty="0">
+              <a:rPr lang="en-US" sz="1700" b="1" dirty="0">
                 <a:solidFill>
-                  <a:srgbClr val="FFFFFF"/>
+                  <a:srgbClr val="00629B"/>
                 </a:solidFill>
                 <a:latin typeface="Arial" pitchFamily="34" charset="0"/>
                 <a:ea typeface="Arial" pitchFamily="34" charset="-122"/>
                 <a:cs typeface="Arial" pitchFamily="34" charset="-120"/>
               </a:rPr>
-              <a:t>4</a:t>
+              <a:t>▪  </a:t>
             </a:r>
-            <a:endParaRPr lang="en-US" sz="1600" dirty="0"/>
-          </a:p>
-        </p:txBody>
-      </p:sp>
-      <p:sp>
-        <p:nvSpPr>
-          <p:cNvPr id="18" name="Text 16"/>
-          <p:cNvSpPr txBox="1"/>
-          <p:nvPr/>
-        </p:nvSpPr>
-        <p:spPr>
-          <a:xfrm>
-            <a:off x="1280160" y="4385462"/>
-            <a:ext cx="10222992" cy="760781"/>
-          </a:xfrm>
-          <a:prstGeom prst="rect">
-            <a:avLst/>
-          </a:prstGeom>
-          <a:noFill/>
-          <a:ln/>
-        </p:spPr>
-        <p:txBody>
-          <a:bodyPr wrap="square" lIns="0" tIns="0" rIns="0" bIns="0" rtlCol="0" anchor="ctr"/>
-          <a:lstStyle/>
-          <a:p>
             <a:pPr indent="0" marL="0">
+              <a:spcAft>
+                <a:spcPts val="800"/>
+              </a:spcAft>
               <a:buNone/>
             </a:pPr>
             <a:r>
-              <a:rPr lang="en-US" sz="2000" dirty="0">
+              <a:rPr lang="en-US" sz="1700" dirty="0">
                 <a:solidFill>
                   <a:srgbClr val="272425"/>
                 </a:solidFill>
@@ -27854,131 +27681,36 @@
                 <a:ea typeface="Arial" pitchFamily="34" charset="-122"/>
                 <a:cs typeface="Arial" pitchFamily="34" charset="-120"/>
               </a:rPr>
-              <a:t>TOL-03: el último corte de EVM es del 8/1</a:t>
+              <a:t>comparar: qué entró, salió o cambió entre dos</a:t>
             </a:r>
             <a:endParaRPr lang="en-US" sz="1600" dirty="0"/>
           </a:p>
-        </p:txBody>
-      </p:sp>
-      <p:sp>
-        <p:nvSpPr>
-          <p:cNvPr id="19" name="Shape 17"/>
-          <p:cNvSpPr/>
-          <p:nvPr/>
-        </p:nvSpPr>
-        <p:spPr>
-          <a:xfrm>
-            <a:off x="457200" y="5347411"/>
-            <a:ext cx="11274552" cy="870509"/>
-          </a:xfrm>
-          <a:prstGeom prst="roundRect">
-            <a:avLst>
-              <a:gd name="adj" fmla="val 10504"/>
-            </a:avLst>
-          </a:prstGeom>
-          <a:solidFill>
-            <a:srgbClr val="E9F1F8"/>
-          </a:solidFill>
-          <a:ln w="12700">
-            <a:solidFill>
-              <a:srgbClr val="E9F1F8"/>
-            </a:solidFill>
-            <a:prstDash val="solid"/>
-          </a:ln>
-        </p:spPr>
-      </p:sp>
-      <p:sp>
-        <p:nvSpPr>
-          <p:cNvPr id="20" name="Shape 18"/>
-          <p:cNvSpPr/>
-          <p:nvPr/>
-        </p:nvSpPr>
-        <p:spPr>
-          <a:xfrm>
-            <a:off x="621792" y="5554066"/>
-            <a:ext cx="457200" cy="457200"/>
-          </a:xfrm>
-          <a:prstGeom prst="roundRect">
-            <a:avLst>
-              <a:gd name="adj" fmla="val 16000"/>
-            </a:avLst>
-          </a:prstGeom>
-          <a:solidFill>
-            <a:srgbClr val="00629B"/>
-          </a:solidFill>
-          <a:ln w="12700">
-            <a:solidFill>
-              <a:srgbClr val="00629B"/>
-            </a:solidFill>
-            <a:prstDash val="solid"/>
-          </a:ln>
-        </p:spPr>
-      </p:sp>
-      <p:sp>
-        <p:nvSpPr>
-          <p:cNvPr id="21" name="Text 19"/>
-          <p:cNvSpPr txBox="1"/>
-          <p:nvPr/>
-        </p:nvSpPr>
-        <p:spPr>
-          <a:xfrm>
-            <a:off x="621792" y="5554066"/>
-            <a:ext cx="457200" cy="457200"/>
-          </a:xfrm>
-          <a:prstGeom prst="rect">
-            <a:avLst/>
-          </a:prstGeom>
-          <a:noFill/>
-          <a:ln/>
-        </p:spPr>
-        <p:txBody>
-          <a:bodyPr wrap="square" lIns="0" tIns="0" rIns="0" bIns="0" rtlCol="0" anchor="ctr"/>
-          <a:lstStyle/>
-          <a:p>
-            <a:pPr algn="ctr" indent="0" marL="0">
+          <a:p>
+            <a:pPr indent="0" marL="0">
+              <a:spcAft>
+                <a:spcPts val="800"/>
+              </a:spcAft>
               <a:buNone/>
             </a:pPr>
             <a:r>
-              <a:rPr lang="en-US" sz="1600" b="1" dirty="0">
+              <a:rPr lang="en-US" sz="1700" b="1" dirty="0">
                 <a:solidFill>
-                  <a:srgbClr val="FFFFFF"/>
+                  <a:srgbClr val="00629B"/>
                 </a:solidFill>
                 <a:latin typeface="Arial" pitchFamily="34" charset="0"/>
                 <a:ea typeface="Arial" pitchFamily="34" charset="-122"/>
                 <a:cs typeface="Arial" pitchFamily="34" charset="-120"/>
               </a:rPr>
-              <a:t>5</a:t>
+              <a:t>▪  </a:t>
             </a:r>
-            <a:endParaRPr lang="en-US" sz="1600" dirty="0"/>
-          </a:p>
-        </p:txBody>
-      </p:sp>
-      <p:sp>
-        <p:nvSpPr>
-          <p:cNvPr id="22" name="Text 20"/>
-          <p:cNvSpPr txBox="1"/>
-          <p:nvPr/>
-        </p:nvSpPr>
-        <p:spPr>
-          <a:xfrm>
-            <a:off x="1280160" y="5402275"/>
-            <a:ext cx="10222992" cy="760781"/>
-          </a:xfrm>
-          <a:prstGeom prst="rect">
-            <a:avLst/>
-          </a:prstGeom>
-          <a:noFill/>
-          <a:ln/>
-        </p:spPr>
-        <p:txBody>
-          <a:bodyPr wrap="square" lIns="0" tIns="0" rIns="0" bIns="0" rtlCol="0" anchor="ctr"/>
-          <a:lstStyle/>
-          <a:p>
             <a:pPr indent="0" marL="0">
+              <a:spcAft>
+                <a:spcPts val="800"/>
+              </a:spcAft>
               <a:buNone/>
             </a:pPr>
             <a:r>
-              <a:rPr lang="en-US" sz="2000" dirty="0">
+              <a:rPr lang="en-US" sz="1700" dirty="0">
                 <a:solidFill>
                   <a:srgbClr val="272425"/>
                 </a:solidFill>
@@ -27986,7 +27718,44 @@
                 <a:ea typeface="Arial" pitchFamily="34" charset="-122"/>
                 <a:cs typeface="Arial" pitchFamily="34" charset="-120"/>
               </a:rPr>
-              <a:t>Próximo resumen quincenal: vence el 26/2</a:t>
+              <a:t>--actor: Sofía ve solo C-001, que decide la junta</a:t>
+            </a:r>
+            <a:endParaRPr lang="en-US" sz="1600" dirty="0"/>
+          </a:p>
+          <a:p>
+            <a:pPr indent="0" marL="0">
+              <a:spcAft>
+                <a:spcPts val="800"/>
+              </a:spcAft>
+              <a:buNone/>
+            </a:pPr>
+            <a:r>
+              <a:rPr lang="en-US" sz="1700" b="1" dirty="0">
+                <a:solidFill>
+                  <a:srgbClr val="00629B"/>
+                </a:solidFill>
+                <a:latin typeface="Arial" pitchFamily="34" charset="0"/>
+                <a:ea typeface="Arial" pitchFamily="34" charset="-122"/>
+                <a:cs typeface="Arial" pitchFamily="34" charset="-120"/>
+              </a:rPr>
+              <a:t>▪  </a:t>
+            </a:r>
+            <a:pPr indent="0" marL="0">
+              <a:spcAft>
+                <a:spcPts val="800"/>
+              </a:spcAft>
+              <a:buNone/>
+            </a:pPr>
+            <a:r>
+              <a:rPr lang="en-US" sz="1700" dirty="0">
+                <a:solidFill>
+                  <a:srgbClr val="272425"/>
+                </a:solidFill>
+                <a:latin typeface="Arial" pitchFamily="34" charset="0"/>
+                <a:ea typeface="Arial" pitchFamily="34" charset="-122"/>
+                <a:cs typeface="Arial" pitchFamily="34" charset="-120"/>
+              </a:rPr>
+              <a:t>Con pm-kb: portal y enlace de 7 días, revocable</a:t>
             </a:r>
             <a:endParaRPr lang="en-US" sz="1600" dirty="0"/>
           </a:p>
